--- a/Intro Slides/Environment Setup Slides.pptx
+++ b/Intro Slides/Environment Setup Slides.pptx
@@ -5,7 +5,7 @@
     <p:sldMasterId id="2147483648" r:id="rId1"/>
   </p:sldMasterIdLst>
   <p:notesMasterIdLst>
-    <p:notesMasterId r:id="rId19"/>
+    <p:notesMasterId r:id="rId20"/>
   </p:notesMasterIdLst>
   <p:sldIdLst>
     <p:sldId id="299" r:id="rId2"/>
@@ -25,6 +25,7 @@
     <p:sldId id="320" r:id="rId16"/>
     <p:sldId id="322" r:id="rId17"/>
     <p:sldId id="323" r:id="rId18"/>
+    <p:sldId id="324" r:id="rId19"/>
   </p:sldIdLst>
   <p:sldSz cx="12192000" cy="6858000"/>
   <p:notesSz cx="6858000" cy="9144000"/>
@@ -123,6 +124,11 @@
       </a:defRPr>
     </a:lvl9pPr>
   </p:defaultTextStyle>
+  <p:extLst>
+    <p:ext uri="{EFAFB233-063F-42B5-8137-9DF3F51BA10A}">
+      <p15:sldGuideLst xmlns:p15="http://schemas.microsoft.com/office/powerpoint/2012/main"/>
+    </p:ext>
+  </p:extLst>
 </p:presentation>
 </file>
 
@@ -208,7 +214,7 @@
           <a:p>
             <a:fld id="{3E868B87-9246-41CC-9D9B-D1C1D3FD1748}" type="datetimeFigureOut">
               <a:rPr lang="en-US" smtClean="0"/>
-              <a:t>6/1/2026</a:t>
+              <a:t>7/9/2026</a:t>
             </a:fld>
             <a:endParaRPr lang="en-US"/>
           </a:p>
@@ -1616,6 +1622,151 @@
 </p:notes>
 </file>
 
+<file path=ppt/notesSlides/notesSlide17.xml><?xml version="1.0" encoding="utf-8"?>
+<p:notes xmlns:a="http://schemas.openxmlformats.org/drawingml/2006/main" xmlns:r="http://schemas.openxmlformats.org/officeDocument/2006/relationships" xmlns:p="http://schemas.openxmlformats.org/presentationml/2006/main" showMasterSp="0" showMasterPhAnim="0">
+  <p:cSld>
+    <p:spTree>
+      <p:nvGrpSpPr>
+        <p:cNvPr id="1" name="Shape 244">
+          <a:extLst>
+            <a:ext uri="{FF2B5EF4-FFF2-40B4-BE49-F238E27FC236}">
+              <a16:creationId xmlns:a16="http://schemas.microsoft.com/office/drawing/2014/main" id="{6428D89B-72FF-5811-73EE-6779D6C60683}"/>
+            </a:ext>
+          </a:extLst>
+        </p:cNvPr>
+        <p:cNvGrpSpPr/>
+        <p:nvPr/>
+      </p:nvGrpSpPr>
+      <p:grpSpPr>
+        <a:xfrm>
+          <a:off x="0" y="0"/>
+          <a:ext cx="0" cy="0"/>
+          <a:chOff x="0" y="0"/>
+          <a:chExt cx="0" cy="0"/>
+        </a:xfrm>
+      </p:grpSpPr>
+      <p:sp>
+        <p:nvSpPr>
+          <p:cNvPr id="245" name="Google Shape;245;g364a009736c_2_177:notes">
+            <a:extLst>
+              <a:ext uri="{FF2B5EF4-FFF2-40B4-BE49-F238E27FC236}">
+                <a16:creationId xmlns:a16="http://schemas.microsoft.com/office/drawing/2014/main" id="{B0EC8CAC-4EBA-9CD0-007E-E874A2199C09}"/>
+              </a:ext>
+            </a:extLst>
+          </p:cNvPr>
+          <p:cNvSpPr>
+            <a:spLocks noGrp="1" noRot="1" noChangeAspect="1"/>
+          </p:cNvSpPr>
+          <p:nvPr>
+            <p:ph type="sldImg" idx="2"/>
+          </p:nvPr>
+        </p:nvSpPr>
+        <p:spPr>
+          <a:xfrm>
+            <a:off x="381000" y="685800"/>
+            <a:ext cx="6096000" cy="3429000"/>
+          </a:xfrm>
+          <a:custGeom>
+            <a:avLst/>
+            <a:gdLst/>
+            <a:ahLst/>
+            <a:cxnLst/>
+            <a:rect l="l" t="t" r="r" b="b"/>
+            <a:pathLst>
+              <a:path w="120000" h="120000" extrusionOk="0">
+                <a:moveTo>
+                  <a:pt x="0" y="0"/>
+                </a:moveTo>
+                <a:lnTo>
+                  <a:pt x="120000" y="0"/>
+                </a:lnTo>
+                <a:lnTo>
+                  <a:pt x="120000" y="120000"/>
+                </a:lnTo>
+                <a:lnTo>
+                  <a:pt x="0" y="120000"/>
+                </a:lnTo>
+                <a:close/>
+              </a:path>
+            </a:pathLst>
+          </a:custGeom>
+          <a:noFill/>
+          <a:ln w="9525" cap="flat" cmpd="sng">
+            <a:solidFill>
+              <a:srgbClr val="000000"/>
+            </a:solidFill>
+            <a:prstDash val="solid"/>
+            <a:round/>
+            <a:headEnd type="none" w="sm" len="sm"/>
+            <a:tailEnd type="none" w="sm" len="sm"/>
+          </a:ln>
+        </p:spPr>
+      </p:sp>
+      <p:sp>
+        <p:nvSpPr>
+          <p:cNvPr id="246" name="Google Shape;246;g364a009736c_2_177:notes">
+            <a:extLst>
+              <a:ext uri="{FF2B5EF4-FFF2-40B4-BE49-F238E27FC236}">
+                <a16:creationId xmlns:a16="http://schemas.microsoft.com/office/drawing/2014/main" id="{74BF4144-2DA3-1BEA-5D1A-B5E21615666B}"/>
+              </a:ext>
+            </a:extLst>
+          </p:cNvPr>
+          <p:cNvSpPr txBox="1">
+            <a:spLocks noGrp="1"/>
+          </p:cNvSpPr>
+          <p:nvPr>
+            <p:ph type="body" idx="1"/>
+          </p:nvPr>
+        </p:nvSpPr>
+        <p:spPr>
+          <a:xfrm>
+            <a:off x="685800" y="4343400"/>
+            <a:ext cx="5486400" cy="4114800"/>
+          </a:xfrm>
+          <a:prstGeom prst="rect">
+            <a:avLst/>
+          </a:prstGeom>
+          <a:noFill/>
+          <a:ln>
+            <a:noFill/>
+          </a:ln>
+        </p:spPr>
+        <p:txBody>
+          <a:bodyPr spcFirstLastPara="1" wrap="square" lIns="91425" tIns="91425" rIns="91425" bIns="91425" anchor="t" anchorCtr="0">
+            <a:noAutofit/>
+          </a:bodyPr>
+          <a:lstStyle/>
+          <a:p>
+            <a:pPr marL="457200" lvl="0" indent="-228600" algn="l" rtl="0">
+              <a:lnSpc>
+                <a:spcPct val="100000"/>
+              </a:lnSpc>
+              <a:spcBef>
+                <a:spcPts val="0"/>
+              </a:spcBef>
+              <a:spcAft>
+                <a:spcPts val="0"/>
+              </a:spcAft>
+              <a:buSzPts val="1100"/>
+              <a:buNone/>
+            </a:pPr>
+            <a:endParaRPr/>
+          </a:p>
+        </p:txBody>
+      </p:sp>
+    </p:spTree>
+    <p:extLst>
+      <p:ext uri="{BB962C8B-B14F-4D97-AF65-F5344CB8AC3E}">
+        <p14:creationId xmlns:p14="http://schemas.microsoft.com/office/powerpoint/2010/main" val="61281091"/>
+      </p:ext>
+    </p:extLst>
+  </p:cSld>
+  <p:clrMapOvr>
+    <a:masterClrMapping/>
+  </p:clrMapOvr>
+</p:notes>
+</file>
+
 <file path=ppt/notesSlides/notesSlide2.xml><?xml version="1.0" encoding="utf-8"?>
 <p:notes xmlns:a="http://schemas.openxmlformats.org/drawingml/2006/main" xmlns:r="http://schemas.openxmlformats.org/officeDocument/2006/relationships" xmlns:p="http://schemas.openxmlformats.org/presentationml/2006/main" showMasterSp="0" showMasterPhAnim="0">
   <p:cSld>
@@ -2805,7 +2956,7 @@
           <a:p>
             <a:fld id="{197081D4-2226-4FE6-951C-7A028DFF2E70}" type="datetimeFigureOut">
               <a:rPr lang="en-US" smtClean="0"/>
-              <a:t>6/1/2026</a:t>
+              <a:t>7/9/2026</a:t>
             </a:fld>
             <a:endParaRPr lang="en-US"/>
           </a:p>
@@ -3003,7 +3154,7 @@
           <a:p>
             <a:fld id="{197081D4-2226-4FE6-951C-7A028DFF2E70}" type="datetimeFigureOut">
               <a:rPr lang="en-US" smtClean="0"/>
-              <a:t>6/1/2026</a:t>
+              <a:t>7/9/2026</a:t>
             </a:fld>
             <a:endParaRPr lang="en-US"/>
           </a:p>
@@ -3211,7 +3362,7 @@
           <a:p>
             <a:fld id="{197081D4-2226-4FE6-951C-7A028DFF2E70}" type="datetimeFigureOut">
               <a:rPr lang="en-US" smtClean="0"/>
-              <a:t>6/1/2026</a:t>
+              <a:t>7/9/2026</a:t>
             </a:fld>
             <a:endParaRPr lang="en-US"/>
           </a:p>
@@ -3338,7 +3489,7 @@
           <a:p>
             <a:fld id="{D41656AB-D2E1-472E-8B95-0DF5C6E1D623}" type="datetime3">
               <a:rPr lang="en-US" smtClean="0"/>
-              <a:t>1 June 2026</a:t>
+              <a:t>9 July 2026</a:t>
             </a:fld>
             <a:endParaRPr lang="en-US"/>
           </a:p>
@@ -5265,7 +5416,7 @@
           <a:p>
             <a:fld id="{9BAF1A3D-92FA-4F24-9781-74AFA516A230}" type="datetime3">
               <a:rPr lang="en-US" smtClean="0"/>
-              <a:t>1 June 2026</a:t>
+              <a:t>9 July 2026</a:t>
             </a:fld>
             <a:endParaRPr lang="en-US"/>
           </a:p>
@@ -5510,7 +5661,7 @@
           <a:p>
             <a:fld id="{334F72C3-CDF3-44A8-B602-1649B1728485}" type="datetime3">
               <a:rPr lang="en-US" smtClean="0"/>
-              <a:t>1 June 2026</a:t>
+              <a:t>9 July 2026</a:t>
             </a:fld>
             <a:endParaRPr lang="en-US"/>
           </a:p>
@@ -5700,7 +5851,7 @@
           <a:p>
             <a:fld id="{197081D4-2226-4FE6-951C-7A028DFF2E70}" type="datetimeFigureOut">
               <a:rPr lang="en-US" smtClean="0"/>
-              <a:t>6/1/2026</a:t>
+              <a:t>7/9/2026</a:t>
             </a:fld>
             <a:endParaRPr lang="en-US"/>
           </a:p>
@@ -5975,7 +6126,7 @@
           <a:p>
             <a:fld id="{197081D4-2226-4FE6-951C-7A028DFF2E70}" type="datetimeFigureOut">
               <a:rPr lang="en-US" smtClean="0"/>
-              <a:t>6/1/2026</a:t>
+              <a:t>7/9/2026</a:t>
             </a:fld>
             <a:endParaRPr lang="en-US"/>
           </a:p>
@@ -6240,7 +6391,7 @@
           <a:p>
             <a:fld id="{197081D4-2226-4FE6-951C-7A028DFF2E70}" type="datetimeFigureOut">
               <a:rPr lang="en-US" smtClean="0"/>
-              <a:t>6/1/2026</a:t>
+              <a:t>7/9/2026</a:t>
             </a:fld>
             <a:endParaRPr lang="en-US"/>
           </a:p>
@@ -6652,7 +6803,7 @@
           <a:p>
             <a:fld id="{197081D4-2226-4FE6-951C-7A028DFF2E70}" type="datetimeFigureOut">
               <a:rPr lang="en-US" smtClean="0"/>
-              <a:t>6/1/2026</a:t>
+              <a:t>7/9/2026</a:t>
             </a:fld>
             <a:endParaRPr lang="en-US"/>
           </a:p>
@@ -6793,7 +6944,7 @@
           <a:p>
             <a:fld id="{197081D4-2226-4FE6-951C-7A028DFF2E70}" type="datetimeFigureOut">
               <a:rPr lang="en-US" smtClean="0"/>
-              <a:t>6/1/2026</a:t>
+              <a:t>7/9/2026</a:t>
             </a:fld>
             <a:endParaRPr lang="en-US"/>
           </a:p>
@@ -6906,7 +7057,7 @@
           <a:p>
             <a:fld id="{197081D4-2226-4FE6-951C-7A028DFF2E70}" type="datetimeFigureOut">
               <a:rPr lang="en-US" smtClean="0"/>
-              <a:t>6/1/2026</a:t>
+              <a:t>7/9/2026</a:t>
             </a:fld>
             <a:endParaRPr lang="en-US"/>
           </a:p>
@@ -7217,7 +7368,7 @@
           <a:p>
             <a:fld id="{197081D4-2226-4FE6-951C-7A028DFF2E70}" type="datetimeFigureOut">
               <a:rPr lang="en-US" smtClean="0"/>
-              <a:t>6/1/2026</a:t>
+              <a:t>7/9/2026</a:t>
             </a:fld>
             <a:endParaRPr lang="en-US"/>
           </a:p>
@@ -7505,7 +7656,7 @@
           <a:p>
             <a:fld id="{197081D4-2226-4FE6-951C-7A028DFF2E70}" type="datetimeFigureOut">
               <a:rPr lang="en-US" smtClean="0"/>
-              <a:t>6/1/2026</a:t>
+              <a:t>7/9/2026</a:t>
             </a:fld>
             <a:endParaRPr lang="en-US"/>
           </a:p>
@@ -7746,7 +7897,7 @@
           <a:p>
             <a:fld id="{197081D4-2226-4FE6-951C-7A028DFF2E70}" type="datetimeFigureOut">
               <a:rPr lang="en-US" smtClean="0"/>
-              <a:t>6/1/2026</a:t>
+              <a:t>7/9/2026</a:t>
             </a:fld>
             <a:endParaRPr lang="en-US"/>
           </a:p>
@@ -9961,6 +10112,248 @@
 </p:sld>
 </file>
 
+<file path=ppt/slides/slide18.xml><?xml version="1.0" encoding="utf-8"?>
+<p:sld xmlns:a="http://schemas.openxmlformats.org/drawingml/2006/main" xmlns:r="http://schemas.openxmlformats.org/officeDocument/2006/relationships" xmlns:p="http://schemas.openxmlformats.org/presentationml/2006/main">
+  <p:cSld>
+    <p:spTree>
+      <p:nvGrpSpPr>
+        <p:cNvPr id="1" name="Shape 247">
+          <a:extLst>
+            <a:ext uri="{FF2B5EF4-FFF2-40B4-BE49-F238E27FC236}">
+              <a16:creationId xmlns:a16="http://schemas.microsoft.com/office/drawing/2014/main" id="{76037785-4C94-4741-CF64-92FEC7210828}"/>
+            </a:ext>
+          </a:extLst>
+        </p:cNvPr>
+        <p:cNvGrpSpPr/>
+        <p:nvPr/>
+      </p:nvGrpSpPr>
+      <p:grpSpPr>
+        <a:xfrm>
+          <a:off x="0" y="0"/>
+          <a:ext cx="0" cy="0"/>
+          <a:chOff x="0" y="0"/>
+          <a:chExt cx="0" cy="0"/>
+        </a:xfrm>
+      </p:grpSpPr>
+      <p:sp>
+        <p:nvSpPr>
+          <p:cNvPr id="2" name="Content Placeholder 5">
+            <a:extLst>
+              <a:ext uri="{FF2B5EF4-FFF2-40B4-BE49-F238E27FC236}">
+                <a16:creationId xmlns:a16="http://schemas.microsoft.com/office/drawing/2014/main" id="{1F6F7050-02FA-9B26-A487-0C48A1F5C242}"/>
+              </a:ext>
+            </a:extLst>
+          </p:cNvPr>
+          <p:cNvSpPr txBox="1">
+            <a:spLocks/>
+          </p:cNvSpPr>
+          <p:nvPr/>
+        </p:nvSpPr>
+        <p:spPr>
+          <a:xfrm>
+            <a:off x="731520" y="1143000"/>
+            <a:ext cx="5364480" cy="4572000"/>
+          </a:xfrm>
+          <a:prstGeom prst="rect">
+            <a:avLst/>
+          </a:prstGeom>
+        </p:spPr>
+        <p:txBody>
+          <a:bodyPr/>
+          <a:lstStyle>
+            <a:lvl1pPr marL="137160" indent="-137160" algn="l" defTabSz="685800" rtl="0" eaLnBrk="1" latinLnBrk="0" hangingPunct="1">
+              <a:lnSpc>
+                <a:spcPct val="95000"/>
+              </a:lnSpc>
+              <a:spcBef>
+                <a:spcPts val="750"/>
+              </a:spcBef>
+              <a:buFont typeface="Arial" panose="020B0604020202020204" pitchFamily="34" charset="0"/>
+              <a:buChar char="▪"/>
+              <a:defRPr sz="1275" kern="1200">
+                <a:solidFill>
+                  <a:schemeClr val="tx1"/>
+                </a:solidFill>
+                <a:latin typeface="+mn-lt"/>
+                <a:ea typeface="+mn-ea"/>
+                <a:cs typeface="+mn-cs"/>
+              </a:defRPr>
+            </a:lvl1pPr>
+            <a:lvl2pPr marL="274320" indent="-137160" algn="l" defTabSz="685800" rtl="0" eaLnBrk="1" latinLnBrk="0" hangingPunct="1">
+              <a:lnSpc>
+                <a:spcPct val="95000"/>
+              </a:lnSpc>
+              <a:spcBef>
+                <a:spcPts val="375"/>
+              </a:spcBef>
+              <a:buFont typeface="Arial" panose="020B0604020202020204" pitchFamily="34" charset="0"/>
+              <a:buChar char="–"/>
+              <a:defRPr sz="1275" kern="1200">
+                <a:solidFill>
+                  <a:schemeClr val="tx1"/>
+                </a:solidFill>
+                <a:latin typeface="+mn-lt"/>
+                <a:ea typeface="+mn-ea"/>
+                <a:cs typeface="+mn-cs"/>
+              </a:defRPr>
+            </a:lvl2pPr>
+            <a:lvl3pPr marL="411480" indent="-137160" algn="l" defTabSz="685800" rtl="0" eaLnBrk="1" latinLnBrk="0" hangingPunct="1">
+              <a:lnSpc>
+                <a:spcPct val="95000"/>
+              </a:lnSpc>
+              <a:spcBef>
+                <a:spcPts val="375"/>
+              </a:spcBef>
+              <a:buFont typeface="Arial" panose="020B0604020202020204" pitchFamily="34" charset="0"/>
+              <a:buChar char="–"/>
+              <a:defRPr sz="1275" kern="1200">
+                <a:solidFill>
+                  <a:schemeClr val="tx1"/>
+                </a:solidFill>
+                <a:latin typeface="+mn-lt"/>
+                <a:ea typeface="+mn-ea"/>
+                <a:cs typeface="+mn-cs"/>
+              </a:defRPr>
+            </a:lvl3pPr>
+            <a:lvl4pPr marL="548640" indent="-137160" algn="l" defTabSz="685800" rtl="0" eaLnBrk="1" latinLnBrk="0" hangingPunct="1">
+              <a:lnSpc>
+                <a:spcPct val="95000"/>
+              </a:lnSpc>
+              <a:spcBef>
+                <a:spcPts val="375"/>
+              </a:spcBef>
+              <a:buFont typeface="Arial" panose="020B0604020202020204" pitchFamily="34" charset="0"/>
+              <a:buChar char="–"/>
+              <a:defRPr sz="1275" kern="1200">
+                <a:solidFill>
+                  <a:schemeClr val="tx1"/>
+                </a:solidFill>
+                <a:latin typeface="+mn-lt"/>
+                <a:ea typeface="+mn-ea"/>
+                <a:cs typeface="+mn-cs"/>
+              </a:defRPr>
+            </a:lvl4pPr>
+            <a:lvl5pPr marL="685800" indent="-137160" algn="l" defTabSz="685800" rtl="0" eaLnBrk="1" latinLnBrk="0" hangingPunct="1">
+              <a:lnSpc>
+                <a:spcPct val="95000"/>
+              </a:lnSpc>
+              <a:spcBef>
+                <a:spcPts val="375"/>
+              </a:spcBef>
+              <a:buFont typeface="Arial" panose="020B0604020202020204" pitchFamily="34" charset="0"/>
+              <a:buChar char="–"/>
+              <a:defRPr sz="1275" kern="1200">
+                <a:solidFill>
+                  <a:schemeClr val="tx1"/>
+                </a:solidFill>
+                <a:latin typeface="+mn-lt"/>
+                <a:ea typeface="+mn-ea"/>
+                <a:cs typeface="+mn-cs"/>
+              </a:defRPr>
+            </a:lvl5pPr>
+            <a:lvl6pPr marL="822960" indent="-137160" algn="l" defTabSz="685800" rtl="0" eaLnBrk="1" latinLnBrk="0" hangingPunct="1">
+              <a:lnSpc>
+                <a:spcPct val="95000"/>
+              </a:lnSpc>
+              <a:spcBef>
+                <a:spcPts val="375"/>
+              </a:spcBef>
+              <a:buFont typeface="Arial" panose="020B0604020202020204" pitchFamily="34" charset="0"/>
+              <a:buChar char="–"/>
+              <a:defRPr sz="1275" kern="1200">
+                <a:solidFill>
+                  <a:schemeClr val="tx1"/>
+                </a:solidFill>
+                <a:latin typeface="+mn-lt"/>
+                <a:ea typeface="+mn-ea"/>
+                <a:cs typeface="+mn-cs"/>
+              </a:defRPr>
+            </a:lvl6pPr>
+            <a:lvl7pPr marL="960120" indent="-137160" algn="l" defTabSz="685800" rtl="0" eaLnBrk="1" latinLnBrk="0" hangingPunct="1">
+              <a:lnSpc>
+                <a:spcPct val="95000"/>
+              </a:lnSpc>
+              <a:spcBef>
+                <a:spcPts val="375"/>
+              </a:spcBef>
+              <a:buFont typeface="Arial" panose="020B0604020202020204" pitchFamily="34" charset="0"/>
+              <a:buChar char="–"/>
+              <a:defRPr sz="1275" kern="1200">
+                <a:solidFill>
+                  <a:schemeClr val="tx1"/>
+                </a:solidFill>
+                <a:latin typeface="+mn-lt"/>
+                <a:ea typeface="+mn-ea"/>
+                <a:cs typeface="+mn-cs"/>
+              </a:defRPr>
+            </a:lvl7pPr>
+            <a:lvl8pPr marL="1097280" indent="-137160" algn="l" defTabSz="685800" rtl="0" eaLnBrk="1" latinLnBrk="0" hangingPunct="1">
+              <a:lnSpc>
+                <a:spcPct val="95000"/>
+              </a:lnSpc>
+              <a:spcBef>
+                <a:spcPts val="375"/>
+              </a:spcBef>
+              <a:buFont typeface="Arial" panose="020B0604020202020204" pitchFamily="34" charset="0"/>
+              <a:buChar char="–"/>
+              <a:defRPr sz="1275" kern="1200">
+                <a:solidFill>
+                  <a:schemeClr val="tx1"/>
+                </a:solidFill>
+                <a:latin typeface="+mn-lt"/>
+                <a:ea typeface="+mn-ea"/>
+                <a:cs typeface="+mn-cs"/>
+              </a:defRPr>
+            </a:lvl8pPr>
+            <a:lvl9pPr marL="1234440" indent="-137160" algn="l" defTabSz="685800" rtl="0" eaLnBrk="1" latinLnBrk="0" hangingPunct="1">
+              <a:lnSpc>
+                <a:spcPct val="95000"/>
+              </a:lnSpc>
+              <a:spcBef>
+                <a:spcPts val="375"/>
+              </a:spcBef>
+              <a:buFont typeface="Arial" panose="020B0604020202020204" pitchFamily="34" charset="0"/>
+              <a:buChar char="–"/>
+              <a:defRPr sz="1275" kern="1200">
+                <a:solidFill>
+                  <a:schemeClr val="tx1"/>
+                </a:solidFill>
+                <a:latin typeface="+mn-lt"/>
+                <a:ea typeface="+mn-ea"/>
+                <a:cs typeface="+mn-cs"/>
+              </a:defRPr>
+            </a:lvl9pPr>
+          </a:lstStyle>
+          <a:p>
+            <a:pPr marL="0" indent="0">
+              <a:buNone/>
+            </a:pPr>
+            <a:r>
+              <a:rPr lang="en-US" sz="2133" dirty="0"/>
+              <a:t>How to run a python script!</a:t>
+            </a:r>
+          </a:p>
+          <a:p>
+            <a:pPr>
+              <a:buClrTx/>
+            </a:pPr>
+            <a:endParaRPr lang="en-US" sz="2133" dirty="0"/>
+          </a:p>
+        </p:txBody>
+      </p:sp>
+    </p:spTree>
+    <p:extLst>
+      <p:ext uri="{BB962C8B-B14F-4D97-AF65-F5344CB8AC3E}">
+        <p14:creationId xmlns:p14="http://schemas.microsoft.com/office/powerpoint/2010/main" val="3936137032"/>
+      </p:ext>
+    </p:extLst>
+  </p:cSld>
+  <p:clrMapOvr>
+    <a:masterClrMapping/>
+  </p:clrMapOvr>
+</p:sld>
+</file>
+
 <file path=ppt/slides/slide2.xml><?xml version="1.0" encoding="utf-8"?>
 <p:sld xmlns:a="http://schemas.openxmlformats.org/drawingml/2006/main" xmlns:r="http://schemas.openxmlformats.org/officeDocument/2006/relationships" xmlns:p="http://schemas.openxmlformats.org/presentationml/2006/main">
   <p:cSld>
@@ -11204,7 +11597,7 @@
         <p:spPr>
           <a:xfrm>
             <a:off x="548642" y="1818587"/>
-            <a:ext cx="7916375" cy="4023360"/>
+            <a:ext cx="9317734" cy="4023360"/>
           </a:xfrm>
         </p:spPr>
         <p:txBody>
